--- a/training/English (en)/COBT Training Modules [COBT-T] /16. Scripture Engagement/16 Intro to Scripture Engagement - Slides.pptx
+++ b/training/English (en)/COBT Training Modules [COBT-T] /16. Scripture Engagement/16 Intro to Scripture Engagement - Slides.pptx
@@ -225,7 +225,7 @@
           <a:p>
             <a:fld id="{AC6AA070-92F4-A447-BB88-F5E94FF9CF8B}" type="datetimeFigureOut">
               <a:rPr lang="en-US" smtClean="0"/>
-              <a:t>10/23/25</a:t>
+              <a:t>2/5/26</a:t>
             </a:fld>
             <a:endParaRPr lang="en-US" dirty="0"/>
           </a:p>
@@ -1037,7 +1037,7 @@
           <a:p>
             <a:fld id="{2D176C0A-5C67-429D-B78E-C0F7FE360763}" type="datetimeFigureOut">
               <a:rPr lang="en-US" smtClean="0"/>
-              <a:t>10/23/25</a:t>
+              <a:t>2/5/26</a:t>
             </a:fld>
             <a:endParaRPr lang="en-US" dirty="0"/>
           </a:p>
@@ -4538,7 +4538,7 @@
         </p:blipFill>
         <p:spPr>
           <a:xfrm>
-            <a:off x="157868" y="1280160"/>
+            <a:off x="181017" y="472871"/>
             <a:ext cx="6719938" cy="5191328"/>
           </a:xfrm>
           <a:prstGeom prst="rect">
@@ -4834,8 +4834,8 @@
         </p:blipFill>
         <p:spPr bwMode="auto">
           <a:xfrm>
-            <a:off x="6463284" y="3944983"/>
-            <a:ext cx="5540396" cy="4183564"/>
+            <a:off x="6286113" y="1192298"/>
+            <a:ext cx="5605596" cy="4183564"/>
           </a:xfrm>
           <a:prstGeom prst="rect">
             <a:avLst/>
@@ -6634,8 +6634,23 @@
 </file>
 
 <file path=customXml/item1.xml><?xml version="1.0" encoding="utf-8"?>
-<ct:contentTypeSchema xmlns:ct="http://schemas.microsoft.com/office/2006/metadata/contentType" xmlns:ma="http://schemas.microsoft.com/office/2006/metadata/properties/metaAttributes" ct:_="" ma:_="" ma:contentTypeName="Document" ma:contentTypeID="0x0101002F017C5ECD5AE84588140775F5D9B6FC" ma:contentTypeVersion="10" ma:contentTypeDescription="Create a new document." ma:contentTypeScope="" ma:versionID="3fff9ed69b78a1d1c48e3f96068d2b17">
-  <xsd:schema xmlns:xsd="http://www.w3.org/2001/XMLSchema" xmlns:xs="http://www.w3.org/2001/XMLSchema" xmlns:p="http://schemas.microsoft.com/office/2006/metadata/properties" xmlns:ns2="fee82e44-1fa4-4144-8309-00fed2bf4198" xmlns:ns3="1a61c928-f5f6-4989-bd5d-cb8872a1b06d" targetNamespace="http://schemas.microsoft.com/office/2006/metadata/properties" ma:root="true" ma:fieldsID="7b2c40b849e0c1cff02f16dd8f1be10b" ns2:_="" ns3:_="">
+<?mso-contentType ?>
+<FormTemplates xmlns="http://schemas.microsoft.com/sharepoint/v3/contenttype/forms">
+  <Display>DocumentLibraryForm</Display>
+  <Edit>DocumentLibraryForm</Edit>
+  <New>DocumentLibraryForm</New>
+</FormTemplates>
+</file>
+
+<file path=customXml/item2.xml><?xml version="1.0" encoding="utf-8"?>
+<p:properties xmlns:p="http://schemas.microsoft.com/office/2006/metadata/properties" xmlns:xsi="http://www.w3.org/2001/XMLSchema-instance" xmlns:pc="http://schemas.microsoft.com/office/infopath/2007/PartnerControls">
+  <documentManagement/>
+</p:properties>
+</file>
+
+<file path=customXml/item3.xml><?xml version="1.0" encoding="utf-8"?>
+<ct:contentTypeSchema xmlns:ct="http://schemas.microsoft.com/office/2006/metadata/contentType" xmlns:ma="http://schemas.microsoft.com/office/2006/metadata/properties/metaAttributes" ct:_="" ma:_="" ma:contentTypeName="Document" ma:contentTypeID="0x0101002F017C5ECD5AE84588140775F5D9B6FC" ma:contentTypeVersion="10" ma:contentTypeDescription="Create a new document." ma:contentTypeScope="" ma:versionID="1a5380cb2be4a51461126b02f947e923">
+  <xsd:schema xmlns:xsd="http://www.w3.org/2001/XMLSchema" xmlns:xs="http://www.w3.org/2001/XMLSchema" xmlns:p="http://schemas.microsoft.com/office/2006/metadata/properties" xmlns:ns2="fee82e44-1fa4-4144-8309-00fed2bf4198" xmlns:ns3="1a61c928-f5f6-4989-bd5d-cb8872a1b06d" targetNamespace="http://schemas.microsoft.com/office/2006/metadata/properties" ma:root="true" ma:fieldsID="9bf58d68fa2085cb5739c341b0c4cacb" ns2:_="" ns3:_="">
     <xsd:import namespace="fee82e44-1fa4-4144-8309-00fed2bf4198"/>
     <xsd:import namespace="1a61c928-f5f6-4989-bd5d-cb8872a1b06d"/>
     <xsd:element name="properties">
@@ -6834,23 +6849,12 @@
 </ct:contentTypeSchema>
 </file>
 
-<file path=customXml/item2.xml><?xml version="1.0" encoding="utf-8"?>
-<p:properties xmlns:p="http://schemas.microsoft.com/office/2006/metadata/properties" xmlns:xsi="http://www.w3.org/2001/XMLSchema-instance" xmlns:pc="http://schemas.microsoft.com/office/infopath/2007/PartnerControls">
-  <documentManagement/>
-</p:properties>
-</file>
-
-<file path=customXml/item3.xml><?xml version="1.0" encoding="utf-8"?>
-<?mso-contentType ?>
-<FormTemplates xmlns="http://schemas.microsoft.com/sharepoint/v3/contenttype/forms">
-  <Display>DocumentLibraryForm</Display>
-  <Edit>DocumentLibraryForm</Edit>
-  <New>DocumentLibraryForm</New>
-</FormTemplates>
-</file>
-
 <file path=customXml/itemProps1.xml><?xml version="1.0" encoding="utf-8"?>
-<ds:datastoreItem xmlns:ds="http://schemas.openxmlformats.org/officeDocument/2006/customXml" ds:itemID="{07DB23C2-520C-4F9B-A691-381A6D9DE782}"/>
+<ds:datastoreItem xmlns:ds="http://schemas.openxmlformats.org/officeDocument/2006/customXml" ds:itemID="{B178770A-F6AC-406B-AF0D-88CBCF36B701}">
+  <ds:schemaRefs>
+    <ds:schemaRef ds:uri="http://schemas.microsoft.com/sharepoint/v3/contenttype/forms"/>
+  </ds:schemaRefs>
+</ds:datastoreItem>
 </file>
 
 <file path=customXml/itemProps2.xml><?xml version="1.0" encoding="utf-8"?>
@@ -6863,9 +6867,5 @@
 </file>
 
 <file path=customXml/itemProps3.xml><?xml version="1.0" encoding="utf-8"?>
-<ds:datastoreItem xmlns:ds="http://schemas.openxmlformats.org/officeDocument/2006/customXml" ds:itemID="{B178770A-F6AC-406B-AF0D-88CBCF36B701}">
-  <ds:schemaRefs>
-    <ds:schemaRef ds:uri="http://schemas.microsoft.com/sharepoint/v3/contenttype/forms"/>
-  </ds:schemaRefs>
-</ds:datastoreItem>
+<ds:datastoreItem xmlns:ds="http://schemas.openxmlformats.org/officeDocument/2006/customXml" ds:itemID="{BB2C7D13-03AB-4601-97E8-93CC19DA5F97}"/>
 </file>